--- a/m3/diapositivos/sessao-06-m3-f13.pptx
+++ b/m3/diapositivos/sessao-06-m3-f13.pptx
@@ -3878,7 +3878,35 @@
                 <a:ea typeface="Arial" pitchFamily="34" charset="-122"/>
                 <a:cs typeface="Arial" pitchFamily="34" charset="-120"/>
               </a:rPr>
-              <a:t>Luís de Camões, Os Lusíadas (1572), I, 106.</a:t>
+              <a:t>Luís de Camões, </a:t>
+            </a:r>
+            <a:pPr indent="0" marL="0">
+              <a:buNone/>
+            </a:pPr>
+            <a:r>
+              <a:rPr lang="en-US" sz="1200" i="1" dirty="0">
+                <a:solidFill>
+                  <a:srgbClr val="A9A79F"/>
+                </a:solidFill>
+                <a:latin typeface="Arial" pitchFamily="34" charset="0"/>
+                <a:ea typeface="Arial" pitchFamily="34" charset="-122"/>
+                <a:cs typeface="Arial" pitchFamily="34" charset="-120"/>
+              </a:rPr>
+              <a:t>Os Lusíadas</a:t>
+            </a:r>
+            <a:pPr indent="0" marL="0">
+              <a:buNone/>
+            </a:pPr>
+            <a:r>
+              <a:rPr lang="en-US" sz="1200" dirty="0">
+                <a:solidFill>
+                  <a:srgbClr val="A9A79F"/>
+                </a:solidFill>
+                <a:latin typeface="Arial" pitchFamily="34" charset="0"/>
+                <a:ea typeface="Arial" pitchFamily="34" charset="-122"/>
+                <a:cs typeface="Arial" pitchFamily="34" charset="-120"/>
+              </a:rPr>
+              <a:t> (1572), I, 106.</a:t>
             </a:r>
             <a:endParaRPr lang="en-US" sz="1200" dirty="0"/>
           </a:p>
@@ -4338,7 +4366,35 @@
                 <a:ea typeface="Arial" pitchFamily="34" charset="-122"/>
                 <a:cs typeface="Arial" pitchFamily="34" charset="-120"/>
               </a:rPr>
-              <a:t>Luís de Camões, Os Lusíadas (1572), VIII, 96 a 99.</a:t>
+              <a:t>Luís de Camões, </a:t>
+            </a:r>
+            <a:pPr indent="0" marL="0">
+              <a:buNone/>
+            </a:pPr>
+            <a:r>
+              <a:rPr lang="en-US" sz="1200" i="1" dirty="0">
+                <a:solidFill>
+                  <a:srgbClr val="A9A79F"/>
+                </a:solidFill>
+                <a:latin typeface="Arial" pitchFamily="34" charset="0"/>
+                <a:ea typeface="Arial" pitchFamily="34" charset="-122"/>
+                <a:cs typeface="Arial" pitchFamily="34" charset="-120"/>
+              </a:rPr>
+              <a:t>Os Lusíadas</a:t>
+            </a:r>
+            <a:pPr indent="0" marL="0">
+              <a:buNone/>
+            </a:pPr>
+            <a:r>
+              <a:rPr lang="en-US" sz="1200" dirty="0">
+                <a:solidFill>
+                  <a:srgbClr val="A9A79F"/>
+                </a:solidFill>
+                <a:latin typeface="Arial" pitchFamily="34" charset="0"/>
+                <a:ea typeface="Arial" pitchFamily="34" charset="-122"/>
+                <a:cs typeface="Arial" pitchFamily="34" charset="-120"/>
+              </a:rPr>
+              <a:t> (1572), VIII, 96 a 99.</a:t>
             </a:r>
             <a:endParaRPr lang="en-US" sz="1200" dirty="0"/>
           </a:p>
@@ -4818,7 +4874,35 @@
                 <a:ea typeface="Arial" pitchFamily="34" charset="-122"/>
                 <a:cs typeface="Arial" pitchFamily="34" charset="-120"/>
               </a:rPr>
-              <a:t>Luís de Camões, Os Lusíadas (1572), VIII, 96 a 99.</a:t>
+              <a:t>Luís de Camões, </a:t>
+            </a:r>
+            <a:pPr indent="0" marL="0">
+              <a:buNone/>
+            </a:pPr>
+            <a:r>
+              <a:rPr lang="en-US" sz="1200" i="1" dirty="0">
+                <a:solidFill>
+                  <a:srgbClr val="A9A79F"/>
+                </a:solidFill>
+                <a:latin typeface="Arial" pitchFamily="34" charset="0"/>
+                <a:ea typeface="Arial" pitchFamily="34" charset="-122"/>
+                <a:cs typeface="Arial" pitchFamily="34" charset="-120"/>
+              </a:rPr>
+              <a:t>Os Lusíadas</a:t>
+            </a:r>
+            <a:pPr indent="0" marL="0">
+              <a:buNone/>
+            </a:pPr>
+            <a:r>
+              <a:rPr lang="en-US" sz="1200" dirty="0">
+                <a:solidFill>
+                  <a:srgbClr val="A9A79F"/>
+                </a:solidFill>
+                <a:latin typeface="Arial" pitchFamily="34" charset="0"/>
+                <a:ea typeface="Arial" pitchFamily="34" charset="-122"/>
+                <a:cs typeface="Arial" pitchFamily="34" charset="-120"/>
+              </a:rPr>
+              <a:t> (1572), VIII, 96 a 99.</a:t>
             </a:r>
             <a:endParaRPr lang="en-US" sz="1200" dirty="0"/>
           </a:p>
@@ -5217,6 +5301,23 @@
               <a:buNone/>
             </a:pPr>
             <a:r>
+              <a:rPr lang="en-US" sz="2200" i="1" dirty="0">
+                <a:solidFill>
+                  <a:srgbClr val="F2F0EA"/>
+                </a:solidFill>
+                <a:latin typeface="Arial" pitchFamily="34" charset="0"/>
+                <a:ea typeface="Arial" pitchFamily="34" charset="-122"/>
+                <a:cs typeface="Arial" pitchFamily="34" charset="-120"/>
+              </a:rPr>
+              <a:t>Os Lusíadas</a:t>
+            </a:r>
+            <a:pPr indent="0" marL="0">
+              <a:lnSpc>
+                <a:spcPct val="105000"/>
+              </a:lnSpc>
+              <a:buNone/>
+            </a:pPr>
+            <a:r>
               <a:rPr lang="en-US" sz="2200" dirty="0">
                 <a:solidFill>
                   <a:srgbClr val="F2F0EA"/>
@@ -5225,7 +5326,7 @@
                 <a:ea typeface="Arial" pitchFamily="34" charset="-122"/>
                 <a:cs typeface="Arial" pitchFamily="34" charset="-120"/>
               </a:rPr>
-              <a:t>Os Lusíadas cruzam quatro planos; nas reflexões do Poeta, Camões interrompe a viagem para julgar: no fim do canto I e no canto VIII.</a:t>
+              <a:t> cruzam quatro planos; nas reflexões do Poeta, Camões interrompe a viagem para julgar: no fim do canto I e no canto VIII.</a:t>
             </a:r>
             <a:endParaRPr lang="en-US" sz="2200" dirty="0"/>
           </a:p>
